--- a/docs/business/Training-Program.pptx
+++ b/docs/business/Training-Program.pptx
@@ -5,15 +5,15 @@
     <p:sldMasterId id="2147483648" r:id="rId1"/>
   </p:sldMasterIdLst>
   <p:sldIdLst>
-    <p:sldId id="256" r:id="rId7"/>
-    <p:sldId id="257" r:id="rId8"/>
-    <p:sldId id="258" r:id="rId9"/>
-    <p:sldId id="259" r:id="rId10"/>
-    <p:sldId id="260" r:id="rId11"/>
-    <p:sldId id="261" r:id="rId12"/>
-    <p:sldId id="262" r:id="rId13"/>
+    <p:sldId id="256" r:id="rId2"/>
+    <p:sldId id="257" r:id="rId3"/>
+    <p:sldId id="258" r:id="rId4"/>
+    <p:sldId id="259" r:id="rId5"/>
+    <p:sldId id="260" r:id="rId6"/>
+    <p:sldId id="261" r:id="rId7"/>
+    <p:sldId id="262" r:id="rId8"/>
   </p:sldIdLst>
-  <p:sldSz cx="12191695" cy="6858000" type="screen4x3"/>
+  <p:sldSz cx="12192000" cy="6858000"/>
   <p:notesSz cx="6858000" cy="9144000"/>
   <p:defaultTextStyle>
     <a:defPPr>
@@ -110,6 +110,22 @@
       </a:defRPr>
     </a:lvl9pPr>
   </p:defaultTextStyle>
+  <p:extLst>
+    <p:ext uri="{EFAFB233-063F-42B5-8137-9DF3F51BA10A}">
+      <p15:sldGuideLst xmlns:p15="http://schemas.microsoft.com/office/powerpoint/2012/main">
+        <p15:guide id="1" orient="horz" pos="2160">
+          <p15:clr>
+            <a:srgbClr val="A4A3A4"/>
+          </p15:clr>
+        </p15:guide>
+        <p15:guide id="2" pos="2880">
+          <p15:clr>
+            <a:srgbClr val="A4A3A4"/>
+          </p15:clr>
+        </p15:guide>
+      </p15:sldGuideLst>
+    </p:ext>
+  </p:extLst>
 </p:presentation>
 </file>
 
@@ -151,10 +167,9 @@
           <a:lstStyle/>
           <a:p>
             <a:r>
-              <a:rPr lang="en-US" smtClean="0"/>
+              <a:rPr lang="en-US"/>
               <a:t>Click to edit Master title style</a:t>
             </a:r>
-            <a:endParaRPr lang="en-US"/>
           </a:p>
         </p:txBody>
       </p:sp>
@@ -270,10 +285,9 @@
           </a:lstStyle>
           <a:p>
             <a:r>
-              <a:rPr lang="en-US" smtClean="0"/>
+              <a:rPr lang="en-US"/>
               <a:t>Click to edit Master subtitle style</a:t>
             </a:r>
-            <a:endParaRPr lang="en-US"/>
           </a:p>
         </p:txBody>
       </p:sp>
@@ -294,7 +308,7 @@
           <a:p>
             <a:fld id="{5BCAD085-E8A6-8845-BD4E-CB4CCA059FC4}" type="datetimeFigureOut">
               <a:rPr lang="en-US" smtClean="0"/>
-              <a:t>1/27/13</a:t>
+              <a:t>7/8/2026</a:t>
             </a:fld>
             <a:endParaRPr lang="en-US"/>
           </a:p>
@@ -388,10 +402,9 @@
           <a:lstStyle/>
           <a:p>
             <a:r>
-              <a:rPr lang="en-US" smtClean="0"/>
+              <a:rPr lang="en-US"/>
               <a:t>Click to edit Master title style</a:t>
             </a:r>
-            <a:endParaRPr lang="en-US"/>
           </a:p>
         </p:txBody>
       </p:sp>
@@ -412,38 +425,37 @@
           <a:p>
             <a:pPr lvl="0"/>
             <a:r>
-              <a:rPr lang="en-US" smtClean="0"/>
+              <a:rPr lang="en-US"/>
               <a:t>Click to edit Master text styles</a:t>
             </a:r>
           </a:p>
           <a:p>
             <a:pPr lvl="1"/>
             <a:r>
-              <a:rPr lang="en-US" smtClean="0"/>
+              <a:rPr lang="en-US"/>
               <a:t>Second level</a:t>
             </a:r>
           </a:p>
           <a:p>
             <a:pPr lvl="2"/>
             <a:r>
-              <a:rPr lang="en-US" smtClean="0"/>
+              <a:rPr lang="en-US"/>
               <a:t>Third level</a:t>
             </a:r>
           </a:p>
           <a:p>
             <a:pPr lvl="3"/>
             <a:r>
-              <a:rPr lang="en-US" smtClean="0"/>
+              <a:rPr lang="en-US"/>
               <a:t>Fourth level</a:t>
             </a:r>
           </a:p>
           <a:p>
             <a:pPr lvl="4"/>
             <a:r>
-              <a:rPr lang="en-US" smtClean="0"/>
+              <a:rPr lang="en-US"/>
               <a:t>Fifth level</a:t>
             </a:r>
-            <a:endParaRPr lang="en-US"/>
           </a:p>
         </p:txBody>
       </p:sp>
@@ -464,7 +476,7 @@
           <a:p>
             <a:fld id="{5BCAD085-E8A6-8845-BD4E-CB4CCA059FC4}" type="datetimeFigureOut">
               <a:rPr lang="en-US" smtClean="0"/>
-              <a:t>1/27/13</a:t>
+              <a:t>7/8/2026</a:t>
             </a:fld>
             <a:endParaRPr lang="en-US"/>
           </a:p>
@@ -563,10 +575,9 @@
           <a:lstStyle/>
           <a:p>
             <a:r>
-              <a:rPr lang="en-US" smtClean="0"/>
+              <a:rPr lang="en-US"/>
               <a:t>Click to edit Master title style</a:t>
             </a:r>
-            <a:endParaRPr lang="en-US"/>
           </a:p>
         </p:txBody>
       </p:sp>
@@ -592,38 +603,37 @@
           <a:p>
             <a:pPr lvl="0"/>
             <a:r>
-              <a:rPr lang="en-US" smtClean="0"/>
+              <a:rPr lang="en-US"/>
               <a:t>Click to edit Master text styles</a:t>
             </a:r>
           </a:p>
           <a:p>
             <a:pPr lvl="1"/>
             <a:r>
-              <a:rPr lang="en-US" smtClean="0"/>
+              <a:rPr lang="en-US"/>
               <a:t>Second level</a:t>
             </a:r>
           </a:p>
           <a:p>
             <a:pPr lvl="2"/>
             <a:r>
-              <a:rPr lang="en-US" smtClean="0"/>
+              <a:rPr lang="en-US"/>
               <a:t>Third level</a:t>
             </a:r>
           </a:p>
           <a:p>
             <a:pPr lvl="3"/>
             <a:r>
-              <a:rPr lang="en-US" smtClean="0"/>
+              <a:rPr lang="en-US"/>
               <a:t>Fourth level</a:t>
             </a:r>
           </a:p>
           <a:p>
             <a:pPr lvl="4"/>
             <a:r>
-              <a:rPr lang="en-US" smtClean="0"/>
+              <a:rPr lang="en-US"/>
               <a:t>Fifth level</a:t>
             </a:r>
-            <a:endParaRPr lang="en-US"/>
           </a:p>
         </p:txBody>
       </p:sp>
@@ -644,7 +654,7 @@
           <a:p>
             <a:fld id="{5BCAD085-E8A6-8845-BD4E-CB4CCA059FC4}" type="datetimeFigureOut">
               <a:rPr lang="en-US" smtClean="0"/>
-              <a:t>1/27/13</a:t>
+              <a:t>7/8/2026</a:t>
             </a:fld>
             <a:endParaRPr lang="en-US"/>
           </a:p>
@@ -738,10 +748,9 @@
           <a:lstStyle/>
           <a:p>
             <a:r>
-              <a:rPr lang="en-US" smtClean="0"/>
+              <a:rPr lang="en-US"/>
               <a:t>Click to edit Master title style</a:t>
             </a:r>
-            <a:endParaRPr lang="en-US"/>
           </a:p>
         </p:txBody>
       </p:sp>
@@ -762,38 +771,37 @@
           <a:p>
             <a:pPr lvl="0"/>
             <a:r>
-              <a:rPr lang="en-US" smtClean="0"/>
+              <a:rPr lang="en-US"/>
               <a:t>Click to edit Master text styles</a:t>
             </a:r>
           </a:p>
           <a:p>
             <a:pPr lvl="1"/>
             <a:r>
-              <a:rPr lang="en-US" smtClean="0"/>
+              <a:rPr lang="en-US"/>
               <a:t>Second level</a:t>
             </a:r>
           </a:p>
           <a:p>
             <a:pPr lvl="2"/>
             <a:r>
-              <a:rPr lang="en-US" smtClean="0"/>
+              <a:rPr lang="en-US"/>
               <a:t>Third level</a:t>
             </a:r>
           </a:p>
           <a:p>
             <a:pPr lvl="3"/>
             <a:r>
-              <a:rPr lang="en-US" smtClean="0"/>
+              <a:rPr lang="en-US"/>
               <a:t>Fourth level</a:t>
             </a:r>
           </a:p>
           <a:p>
             <a:pPr lvl="4"/>
             <a:r>
-              <a:rPr lang="en-US" smtClean="0"/>
+              <a:rPr lang="en-US"/>
               <a:t>Fifth level</a:t>
             </a:r>
-            <a:endParaRPr lang="en-US"/>
           </a:p>
         </p:txBody>
       </p:sp>
@@ -814,7 +822,7 @@
           <a:p>
             <a:fld id="{5BCAD085-E8A6-8845-BD4E-CB4CCA059FC4}" type="datetimeFigureOut">
               <a:rPr lang="en-US" smtClean="0"/>
-              <a:t>1/27/13</a:t>
+              <a:t>7/8/2026</a:t>
             </a:fld>
             <a:endParaRPr lang="en-US"/>
           </a:p>
@@ -917,10 +925,9 @@
           </a:lstStyle>
           <a:p>
             <a:r>
-              <a:rPr lang="en-US" smtClean="0"/>
+              <a:rPr lang="en-US"/>
               <a:t>Click to edit Master title style</a:t>
             </a:r>
-            <a:endParaRPr lang="en-US"/>
           </a:p>
         </p:txBody>
       </p:sp>
@@ -1037,7 +1044,7 @@
           <a:p>
             <a:pPr lvl="0"/>
             <a:r>
-              <a:rPr lang="en-US" smtClean="0"/>
+              <a:rPr lang="en-US"/>
               <a:t>Click to edit Master text styles</a:t>
             </a:r>
           </a:p>
@@ -1060,7 +1067,7 @@
           <a:p>
             <a:fld id="{5BCAD085-E8A6-8845-BD4E-CB4CCA059FC4}" type="datetimeFigureOut">
               <a:rPr lang="en-US" smtClean="0"/>
-              <a:t>1/27/13</a:t>
+              <a:t>7/8/2026</a:t>
             </a:fld>
             <a:endParaRPr lang="en-US"/>
           </a:p>
@@ -1154,10 +1161,9 @@
           <a:lstStyle/>
           <a:p>
             <a:r>
-              <a:rPr lang="en-US" smtClean="0"/>
+              <a:rPr lang="en-US"/>
               <a:t>Click to edit Master title style</a:t>
             </a:r>
-            <a:endParaRPr lang="en-US"/>
           </a:p>
         </p:txBody>
       </p:sp>
@@ -1211,38 +1217,37 @@
           <a:p>
             <a:pPr lvl="0"/>
             <a:r>
-              <a:rPr lang="en-US" smtClean="0"/>
+              <a:rPr lang="en-US"/>
               <a:t>Click to edit Master text styles</a:t>
             </a:r>
           </a:p>
           <a:p>
             <a:pPr lvl="1"/>
             <a:r>
-              <a:rPr lang="en-US" smtClean="0"/>
+              <a:rPr lang="en-US"/>
               <a:t>Second level</a:t>
             </a:r>
           </a:p>
           <a:p>
             <a:pPr lvl="2"/>
             <a:r>
-              <a:rPr lang="en-US" smtClean="0"/>
+              <a:rPr lang="en-US"/>
               <a:t>Third level</a:t>
             </a:r>
           </a:p>
           <a:p>
             <a:pPr lvl="3"/>
             <a:r>
-              <a:rPr lang="en-US" smtClean="0"/>
+              <a:rPr lang="en-US"/>
               <a:t>Fourth level</a:t>
             </a:r>
           </a:p>
           <a:p>
             <a:pPr lvl="4"/>
             <a:r>
-              <a:rPr lang="en-US" smtClean="0"/>
+              <a:rPr lang="en-US"/>
               <a:t>Fifth level</a:t>
             </a:r>
-            <a:endParaRPr lang="en-US"/>
           </a:p>
         </p:txBody>
       </p:sp>
@@ -1296,38 +1301,37 @@
           <a:p>
             <a:pPr lvl="0"/>
             <a:r>
-              <a:rPr lang="en-US" smtClean="0"/>
+              <a:rPr lang="en-US"/>
               <a:t>Click to edit Master text styles</a:t>
             </a:r>
           </a:p>
           <a:p>
             <a:pPr lvl="1"/>
             <a:r>
-              <a:rPr lang="en-US" smtClean="0"/>
+              <a:rPr lang="en-US"/>
               <a:t>Second level</a:t>
             </a:r>
           </a:p>
           <a:p>
             <a:pPr lvl="2"/>
             <a:r>
-              <a:rPr lang="en-US" smtClean="0"/>
+              <a:rPr lang="en-US"/>
               <a:t>Third level</a:t>
             </a:r>
           </a:p>
           <a:p>
             <a:pPr lvl="3"/>
             <a:r>
-              <a:rPr lang="en-US" smtClean="0"/>
+              <a:rPr lang="en-US"/>
               <a:t>Fourth level</a:t>
             </a:r>
           </a:p>
           <a:p>
             <a:pPr lvl="4"/>
             <a:r>
-              <a:rPr lang="en-US" smtClean="0"/>
+              <a:rPr lang="en-US"/>
               <a:t>Fifth level</a:t>
             </a:r>
-            <a:endParaRPr lang="en-US"/>
           </a:p>
         </p:txBody>
       </p:sp>
@@ -1348,7 +1352,7 @@
           <a:p>
             <a:fld id="{5BCAD085-E8A6-8845-BD4E-CB4CCA059FC4}" type="datetimeFigureOut">
               <a:rPr lang="en-US" smtClean="0"/>
-              <a:t>1/27/13</a:t>
+              <a:t>7/8/2026</a:t>
             </a:fld>
             <a:endParaRPr lang="en-US"/>
           </a:p>
@@ -1446,10 +1450,9 @@
           </a:lstStyle>
           <a:p>
             <a:r>
-              <a:rPr lang="en-US" smtClean="0"/>
+              <a:rPr lang="en-US"/>
               <a:t>Click to edit Master title style</a:t>
             </a:r>
-            <a:endParaRPr lang="en-US"/>
           </a:p>
         </p:txBody>
       </p:sp>
@@ -1512,7 +1515,7 @@
           <a:p>
             <a:pPr lvl="0"/>
             <a:r>
-              <a:rPr lang="en-US" smtClean="0"/>
+              <a:rPr lang="en-US"/>
               <a:t>Click to edit Master text styles</a:t>
             </a:r>
           </a:p>
@@ -1568,38 +1571,37 @@
           <a:p>
             <a:pPr lvl="0"/>
             <a:r>
-              <a:rPr lang="en-US" smtClean="0"/>
+              <a:rPr lang="en-US"/>
               <a:t>Click to edit Master text styles</a:t>
             </a:r>
           </a:p>
           <a:p>
             <a:pPr lvl="1"/>
             <a:r>
-              <a:rPr lang="en-US" smtClean="0"/>
+              <a:rPr lang="en-US"/>
               <a:t>Second level</a:t>
             </a:r>
           </a:p>
           <a:p>
             <a:pPr lvl="2"/>
             <a:r>
-              <a:rPr lang="en-US" smtClean="0"/>
+              <a:rPr lang="en-US"/>
               <a:t>Third level</a:t>
             </a:r>
           </a:p>
           <a:p>
             <a:pPr lvl="3"/>
             <a:r>
-              <a:rPr lang="en-US" smtClean="0"/>
+              <a:rPr lang="en-US"/>
               <a:t>Fourth level</a:t>
             </a:r>
           </a:p>
           <a:p>
             <a:pPr lvl="4"/>
             <a:r>
-              <a:rPr lang="en-US" smtClean="0"/>
+              <a:rPr lang="en-US"/>
               <a:t>Fifth level</a:t>
             </a:r>
-            <a:endParaRPr lang="en-US"/>
           </a:p>
         </p:txBody>
       </p:sp>
@@ -1662,7 +1664,7 @@
           <a:p>
             <a:pPr lvl="0"/>
             <a:r>
-              <a:rPr lang="en-US" smtClean="0"/>
+              <a:rPr lang="en-US"/>
               <a:t>Click to edit Master text styles</a:t>
             </a:r>
           </a:p>
@@ -1718,38 +1720,37 @@
           <a:p>
             <a:pPr lvl="0"/>
             <a:r>
-              <a:rPr lang="en-US" smtClean="0"/>
+              <a:rPr lang="en-US"/>
               <a:t>Click to edit Master text styles</a:t>
             </a:r>
           </a:p>
           <a:p>
             <a:pPr lvl="1"/>
             <a:r>
-              <a:rPr lang="en-US" smtClean="0"/>
+              <a:rPr lang="en-US"/>
               <a:t>Second level</a:t>
             </a:r>
           </a:p>
           <a:p>
             <a:pPr lvl="2"/>
             <a:r>
-              <a:rPr lang="en-US" smtClean="0"/>
+              <a:rPr lang="en-US"/>
               <a:t>Third level</a:t>
             </a:r>
           </a:p>
           <a:p>
             <a:pPr lvl="3"/>
             <a:r>
-              <a:rPr lang="en-US" smtClean="0"/>
+              <a:rPr lang="en-US"/>
               <a:t>Fourth level</a:t>
             </a:r>
           </a:p>
           <a:p>
             <a:pPr lvl="4"/>
             <a:r>
-              <a:rPr lang="en-US" smtClean="0"/>
+              <a:rPr lang="en-US"/>
               <a:t>Fifth level</a:t>
             </a:r>
-            <a:endParaRPr lang="en-US"/>
           </a:p>
         </p:txBody>
       </p:sp>
@@ -1770,7 +1771,7 @@
           <a:p>
             <a:fld id="{5BCAD085-E8A6-8845-BD4E-CB4CCA059FC4}" type="datetimeFigureOut">
               <a:rPr lang="en-US" smtClean="0"/>
-              <a:t>1/27/13</a:t>
+              <a:t>7/8/2026</a:t>
             </a:fld>
             <a:endParaRPr lang="en-US"/>
           </a:p>
@@ -1864,10 +1865,9 @@
           <a:lstStyle/>
           <a:p>
             <a:r>
-              <a:rPr lang="en-US" smtClean="0"/>
+              <a:rPr lang="en-US"/>
               <a:t>Click to edit Master title style</a:t>
             </a:r>
-            <a:endParaRPr lang="en-US"/>
           </a:p>
         </p:txBody>
       </p:sp>
@@ -1888,7 +1888,7 @@
           <a:p>
             <a:fld id="{5BCAD085-E8A6-8845-BD4E-CB4CCA059FC4}" type="datetimeFigureOut">
               <a:rPr lang="en-US" smtClean="0"/>
-              <a:t>1/27/13</a:t>
+              <a:t>7/8/2026</a:t>
             </a:fld>
             <a:endParaRPr lang="en-US"/>
           </a:p>
@@ -1983,7 +1983,7 @@
           <a:p>
             <a:fld id="{5BCAD085-E8A6-8845-BD4E-CB4CCA059FC4}" type="datetimeFigureOut">
               <a:rPr lang="en-US" smtClean="0"/>
-              <a:t>1/27/13</a:t>
+              <a:t>7/8/2026</a:t>
             </a:fld>
             <a:endParaRPr lang="en-US"/>
           </a:p>
@@ -2086,10 +2086,9 @@
           </a:lstStyle>
           <a:p>
             <a:r>
-              <a:rPr lang="en-US" smtClean="0"/>
+              <a:rPr lang="en-US"/>
               <a:t>Click to edit Master title style</a:t>
             </a:r>
-            <a:endParaRPr lang="en-US"/>
           </a:p>
         </p:txBody>
       </p:sp>
@@ -2143,38 +2142,37 @@
           <a:p>
             <a:pPr lvl="0"/>
             <a:r>
-              <a:rPr lang="en-US" smtClean="0"/>
+              <a:rPr lang="en-US"/>
               <a:t>Click to edit Master text styles</a:t>
             </a:r>
           </a:p>
           <a:p>
             <a:pPr lvl="1"/>
             <a:r>
-              <a:rPr lang="en-US" smtClean="0"/>
+              <a:rPr lang="en-US"/>
               <a:t>Second level</a:t>
             </a:r>
           </a:p>
           <a:p>
             <a:pPr lvl="2"/>
             <a:r>
-              <a:rPr lang="en-US" smtClean="0"/>
+              <a:rPr lang="en-US"/>
               <a:t>Third level</a:t>
             </a:r>
           </a:p>
           <a:p>
             <a:pPr lvl="3"/>
             <a:r>
-              <a:rPr lang="en-US" smtClean="0"/>
+              <a:rPr lang="en-US"/>
               <a:t>Fourth level</a:t>
             </a:r>
           </a:p>
           <a:p>
             <a:pPr lvl="4"/>
             <a:r>
-              <a:rPr lang="en-US" smtClean="0"/>
+              <a:rPr lang="en-US"/>
               <a:t>Fifth level</a:t>
             </a:r>
-            <a:endParaRPr lang="en-US"/>
           </a:p>
         </p:txBody>
       </p:sp>
@@ -2237,7 +2235,7 @@
           <a:p>
             <a:pPr lvl="0"/>
             <a:r>
-              <a:rPr lang="en-US" smtClean="0"/>
+              <a:rPr lang="en-US"/>
               <a:t>Click to edit Master text styles</a:t>
             </a:r>
           </a:p>
@@ -2260,7 +2258,7 @@
           <a:p>
             <a:fld id="{5BCAD085-E8A6-8845-BD4E-CB4CCA059FC4}" type="datetimeFigureOut">
               <a:rPr lang="en-US" smtClean="0"/>
-              <a:t>1/27/13</a:t>
+              <a:t>7/8/2026</a:t>
             </a:fld>
             <a:endParaRPr lang="en-US"/>
           </a:p>
@@ -2363,10 +2361,9 @@
           </a:lstStyle>
           <a:p>
             <a:r>
-              <a:rPr lang="en-US" smtClean="0"/>
+              <a:rPr lang="en-US"/>
               <a:t>Click to edit Master title style</a:t>
             </a:r>
-            <a:endParaRPr lang="en-US"/>
           </a:p>
         </p:txBody>
       </p:sp>
@@ -2490,7 +2487,7 @@
           <a:p>
             <a:pPr lvl="0"/>
             <a:r>
-              <a:rPr lang="en-US" smtClean="0"/>
+              <a:rPr lang="en-US"/>
               <a:t>Click to edit Master text styles</a:t>
             </a:r>
           </a:p>
@@ -2513,7 +2510,7 @@
           <a:p>
             <a:fld id="{5BCAD085-E8A6-8845-BD4E-CB4CCA059FC4}" type="datetimeFigureOut">
               <a:rPr lang="en-US" smtClean="0"/>
-              <a:t>1/27/13</a:t>
+              <a:t>7/8/2026</a:t>
             </a:fld>
             <a:endParaRPr lang="en-US"/>
           </a:p>
@@ -2622,10 +2619,9 @@
           <a:lstStyle/>
           <a:p>
             <a:r>
-              <a:rPr lang="en-US" smtClean="0"/>
+              <a:rPr lang="en-US"/>
               <a:t>Click to edit Master title style</a:t>
             </a:r>
-            <a:endParaRPr lang="en-US"/>
           </a:p>
         </p:txBody>
       </p:sp>
@@ -2656,38 +2652,37 @@
           <a:p>
             <a:pPr lvl="0"/>
             <a:r>
-              <a:rPr lang="en-US" smtClean="0"/>
+              <a:rPr lang="en-US"/>
               <a:t>Click to edit Master text styles</a:t>
             </a:r>
           </a:p>
           <a:p>
             <a:pPr lvl="1"/>
             <a:r>
-              <a:rPr lang="en-US" smtClean="0"/>
+              <a:rPr lang="en-US"/>
               <a:t>Second level</a:t>
             </a:r>
           </a:p>
           <a:p>
             <a:pPr lvl="2"/>
             <a:r>
-              <a:rPr lang="en-US" smtClean="0"/>
+              <a:rPr lang="en-US"/>
               <a:t>Third level</a:t>
             </a:r>
           </a:p>
           <a:p>
             <a:pPr lvl="3"/>
             <a:r>
-              <a:rPr lang="en-US" smtClean="0"/>
+              <a:rPr lang="en-US"/>
               <a:t>Fourth level</a:t>
             </a:r>
           </a:p>
           <a:p>
             <a:pPr lvl="4"/>
             <a:r>
-              <a:rPr lang="en-US" smtClean="0"/>
+              <a:rPr lang="en-US"/>
               <a:t>Fifth level</a:t>
             </a:r>
-            <a:endParaRPr lang="en-US"/>
           </a:p>
         </p:txBody>
       </p:sp>
@@ -2726,7 +2721,7 @@
           <a:p>
             <a:fld id="{5BCAD085-E8A6-8845-BD4E-CB4CCA059FC4}" type="datetimeFigureOut">
               <a:rPr lang="en-US" smtClean="0"/>
-              <a:t>1/27/13</a:t>
+              <a:t>7/8/2026</a:t>
             </a:fld>
             <a:endParaRPr lang="en-US"/>
           </a:p>
@@ -3085,7 +3080,7 @@
 </file>
 
 <file path=ppt/slides/slide1.xml><?xml version="1.0" encoding="utf-8"?>
-<p:sld xmlns:a="http://schemas.openxmlformats.org/drawingml/2006/main" xmlns:p="http://schemas.openxmlformats.org/presentationml/2006/main" xmlns:r="http://schemas.openxmlformats.org/officeDocument/2006/relationships">
+<p:sld xmlns:a="http://schemas.openxmlformats.org/drawingml/2006/main" xmlns:r="http://schemas.openxmlformats.org/officeDocument/2006/relationships" xmlns:p="http://schemas.openxmlformats.org/presentationml/2006/main">
   <p:cSld>
     <p:bg>
       <p:bgPr>
@@ -3101,7 +3096,14 @@
         <p:cNvGrpSpPr/>
         <p:nvPr/>
       </p:nvGrpSpPr>
-      <p:grpSpPr/>
+      <p:grpSpPr>
+        <a:xfrm>
+          <a:off x="0" y="0"/>
+          <a:ext cx="0" cy="0"/>
+          <a:chOff x="0" y="0"/>
+          <a:chExt cx="0" cy="0"/>
+        </a:xfrm>
+      </p:grpSpPr>
       <p:sp>
         <p:nvSpPr>
           <p:cNvPr id="2" name="Rectangle 1"/>
@@ -3142,6 +3144,7 @@
           <a:lstStyle/>
           <a:p>
             <a:pPr algn="ctr"/>
+            <a:endParaRPr/>
           </a:p>
         </p:txBody>
       </p:sp>
@@ -3185,6 +3188,7 @@
           <a:lstStyle/>
           <a:p>
             <a:pPr algn="ctr"/>
+            <a:endParaRPr/>
           </a:p>
         </p:txBody>
       </p:sp>
@@ -3228,6 +3232,7 @@
           <a:lstStyle/>
           <a:p>
             <a:pPr algn="ctr"/>
+            <a:endParaRPr/>
           </a:p>
         </p:txBody>
       </p:sp>
@@ -3271,6 +3276,7 @@
           <a:lstStyle/>
           <a:p>
             <a:pPr algn="ctr"/>
+            <a:endParaRPr/>
           </a:p>
         </p:txBody>
       </p:sp>
@@ -3512,6 +3518,7 @@
           <a:lstStyle/>
           <a:p>
             <a:pPr algn="ctr"/>
+            <a:endParaRPr/>
           </a:p>
         </p:txBody>
       </p:sp>
@@ -3555,6 +3562,7 @@
           <a:lstStyle/>
           <a:p>
             <a:pPr algn="ctr"/>
+            <a:endParaRPr/>
           </a:p>
         </p:txBody>
       </p:sp>
@@ -3659,6 +3667,7 @@
           <a:lstStyle/>
           <a:p>
             <a:pPr algn="ctr"/>
+            <a:endParaRPr/>
           </a:p>
         </p:txBody>
       </p:sp>
@@ -3702,6 +3711,7 @@
           <a:lstStyle/>
           <a:p>
             <a:pPr algn="ctr"/>
+            <a:endParaRPr/>
           </a:p>
         </p:txBody>
       </p:sp>
@@ -3806,6 +3816,7 @@
           <a:lstStyle/>
           <a:p>
             <a:pPr algn="ctr"/>
+            <a:endParaRPr/>
           </a:p>
         </p:txBody>
       </p:sp>
@@ -3849,6 +3860,7 @@
           <a:lstStyle/>
           <a:p>
             <a:pPr algn="ctr"/>
+            <a:endParaRPr/>
           </a:p>
         </p:txBody>
       </p:sp>
@@ -4001,7 +4013,7 @@
 </file>
 
 <file path=ppt/slides/slide2.xml><?xml version="1.0" encoding="utf-8"?>
-<p:sld xmlns:a="http://schemas.openxmlformats.org/drawingml/2006/main" xmlns:p="http://schemas.openxmlformats.org/presentationml/2006/main" xmlns:r="http://schemas.openxmlformats.org/officeDocument/2006/relationships">
+<p:sld xmlns:a="http://schemas.openxmlformats.org/drawingml/2006/main" xmlns:r="http://schemas.openxmlformats.org/officeDocument/2006/relationships" xmlns:p="http://schemas.openxmlformats.org/presentationml/2006/main">
   <p:cSld>
     <p:bg>
       <p:bgPr>
@@ -4017,7 +4029,14 @@
         <p:cNvGrpSpPr/>
         <p:nvPr/>
       </p:nvGrpSpPr>
-      <p:grpSpPr/>
+      <p:grpSpPr>
+        <a:xfrm>
+          <a:off x="0" y="0"/>
+          <a:ext cx="0" cy="0"/>
+          <a:chOff x="0" y="0"/>
+          <a:chExt cx="0" cy="0"/>
+        </a:xfrm>
+      </p:grpSpPr>
       <p:sp>
         <p:nvSpPr>
           <p:cNvPr id="2" name="TextBox 1"/>
@@ -4093,6 +4112,7 @@
           <a:lstStyle/>
           <a:p>
             <a:pPr algn="ctr"/>
+            <a:endParaRPr/>
           </a:p>
         </p:txBody>
       </p:sp>
@@ -4173,6 +4193,7 @@
           <a:lstStyle/>
           <a:p>
             <a:pPr algn="ctr"/>
+            <a:endParaRPr/>
           </a:p>
         </p:txBody>
       </p:sp>
@@ -4216,6 +4237,7 @@
           <a:lstStyle/>
           <a:p>
             <a:pPr algn="ctr"/>
+            <a:endParaRPr/>
           </a:p>
         </p:txBody>
       </p:sp>
@@ -4331,6 +4353,7 @@
           <a:lstStyle/>
           <a:p>
             <a:pPr algn="ctr"/>
+            <a:endParaRPr/>
           </a:p>
         </p:txBody>
       </p:sp>
@@ -4374,6 +4397,7 @@
           <a:lstStyle/>
           <a:p>
             <a:pPr algn="ctr"/>
+            <a:endParaRPr/>
           </a:p>
         </p:txBody>
       </p:sp>
@@ -4489,6 +4513,7 @@
           <a:lstStyle/>
           <a:p>
             <a:pPr algn="ctr"/>
+            <a:endParaRPr/>
           </a:p>
         </p:txBody>
       </p:sp>
@@ -4532,6 +4557,7 @@
           <a:lstStyle/>
           <a:p>
             <a:pPr algn="ctr"/>
+            <a:endParaRPr/>
           </a:p>
         </p:txBody>
       </p:sp>
@@ -4647,6 +4673,7 @@
           <a:lstStyle/>
           <a:p>
             <a:pPr algn="ctr"/>
+            <a:endParaRPr/>
           </a:p>
         </p:txBody>
       </p:sp>
@@ -4849,6 +4876,7 @@
           <a:lstStyle/>
           <a:p>
             <a:pPr algn="ctr"/>
+            <a:endParaRPr/>
           </a:p>
         </p:txBody>
       </p:sp>
@@ -5051,6 +5079,7 @@
           <a:lstStyle/>
           <a:p>
             <a:pPr algn="ctr"/>
+            <a:endParaRPr/>
           </a:p>
         </p:txBody>
       </p:sp>
@@ -5253,6 +5282,7 @@
           <a:lstStyle/>
           <a:p>
             <a:pPr algn="ctr"/>
+            <a:endParaRPr/>
           </a:p>
         </p:txBody>
       </p:sp>
@@ -5455,6 +5485,7 @@
           <a:lstStyle/>
           <a:p>
             <a:pPr algn="ctr"/>
+            <a:endParaRPr/>
           </a:p>
         </p:txBody>
       </p:sp>
@@ -5659,7 +5690,7 @@
 </file>
 
 <file path=ppt/slides/slide3.xml><?xml version="1.0" encoding="utf-8"?>
-<p:sld xmlns:a="http://schemas.openxmlformats.org/drawingml/2006/main" xmlns:p="http://schemas.openxmlformats.org/presentationml/2006/main" xmlns:r="http://schemas.openxmlformats.org/officeDocument/2006/relationships">
+<p:sld xmlns:a="http://schemas.openxmlformats.org/drawingml/2006/main" xmlns:r="http://schemas.openxmlformats.org/officeDocument/2006/relationships" xmlns:p="http://schemas.openxmlformats.org/presentationml/2006/main">
   <p:cSld>
     <p:bg>
       <p:bgPr>
@@ -5675,7 +5706,14 @@
         <p:cNvGrpSpPr/>
         <p:nvPr/>
       </p:nvGrpSpPr>
-      <p:grpSpPr/>
+      <p:grpSpPr>
+        <a:xfrm>
+          <a:off x="0" y="0"/>
+          <a:ext cx="0" cy="0"/>
+          <a:chOff x="0" y="0"/>
+          <a:chExt cx="0" cy="0"/>
+        </a:xfrm>
+      </p:grpSpPr>
       <p:sp>
         <p:nvSpPr>
           <p:cNvPr id="2" name="TextBox 1"/>
@@ -5751,6 +5789,7 @@
           <a:lstStyle/>
           <a:p>
             <a:pPr algn="ctr"/>
+            <a:endParaRPr/>
           </a:p>
         </p:txBody>
       </p:sp>
@@ -5934,6 +5973,7 @@
           <a:lstStyle/>
           <a:p>
             <a:pPr algn="ctr"/>
+            <a:endParaRPr/>
           </a:p>
         </p:txBody>
       </p:sp>
@@ -6082,6 +6122,7 @@
           <a:lstStyle/>
           <a:p>
             <a:pPr algn="ctr"/>
+            <a:endParaRPr/>
           </a:p>
         </p:txBody>
       </p:sp>
@@ -6230,6 +6271,7 @@
           <a:lstStyle/>
           <a:p>
             <a:pPr algn="ctr"/>
+            <a:endParaRPr/>
           </a:p>
         </p:txBody>
       </p:sp>
@@ -6378,6 +6420,7 @@
           <a:lstStyle/>
           <a:p>
             <a:pPr algn="ctr"/>
+            <a:endParaRPr/>
           </a:p>
         </p:txBody>
       </p:sp>
@@ -6447,6 +6490,7 @@
           <a:lstStyle/>
           <a:p>
             <a:pPr algn="ctr"/>
+            <a:endParaRPr/>
           </a:p>
         </p:txBody>
       </p:sp>
@@ -6490,6 +6534,7 @@
           <a:lstStyle/>
           <a:p>
             <a:pPr algn="ctr"/>
+            <a:endParaRPr/>
           </a:p>
         </p:txBody>
       </p:sp>
@@ -6607,7 +6652,7 @@
 </file>
 
 <file path=ppt/slides/slide4.xml><?xml version="1.0" encoding="utf-8"?>
-<p:sld xmlns:a="http://schemas.openxmlformats.org/drawingml/2006/main" xmlns:p="http://schemas.openxmlformats.org/presentationml/2006/main" xmlns:r="http://schemas.openxmlformats.org/officeDocument/2006/relationships">
+<p:sld xmlns:a="http://schemas.openxmlformats.org/drawingml/2006/main" xmlns:r="http://schemas.openxmlformats.org/officeDocument/2006/relationships" xmlns:p="http://schemas.openxmlformats.org/presentationml/2006/main">
   <p:cSld>
     <p:bg>
       <p:bgPr>
@@ -6623,7 +6668,14 @@
         <p:cNvGrpSpPr/>
         <p:nvPr/>
       </p:nvGrpSpPr>
-      <p:grpSpPr/>
+      <p:grpSpPr>
+        <a:xfrm>
+          <a:off x="0" y="0"/>
+          <a:ext cx="0" cy="0"/>
+          <a:chOff x="0" y="0"/>
+          <a:chExt cx="0" cy="0"/>
+        </a:xfrm>
+      </p:grpSpPr>
       <p:sp>
         <p:nvSpPr>
           <p:cNvPr id="2" name="TextBox 1"/>
@@ -6699,6 +6751,7 @@
           <a:lstStyle/>
           <a:p>
             <a:pPr algn="ctr"/>
+            <a:endParaRPr/>
           </a:p>
         </p:txBody>
       </p:sp>
@@ -6779,6 +6832,7 @@
           <a:lstStyle/>
           <a:p>
             <a:pPr algn="ctr"/>
+            <a:endParaRPr/>
           </a:p>
         </p:txBody>
       </p:sp>
@@ -6822,6 +6876,7 @@
           <a:lstStyle/>
           <a:p>
             <a:pPr algn="ctr"/>
+            <a:endParaRPr/>
           </a:p>
         </p:txBody>
       </p:sp>
@@ -7007,6 +7062,7 @@
           <a:lstStyle/>
           <a:p>
             <a:pPr algn="ctr"/>
+            <a:endParaRPr/>
           </a:p>
         </p:txBody>
       </p:sp>
@@ -7050,6 +7106,7 @@
           <a:lstStyle/>
           <a:p>
             <a:pPr algn="ctr"/>
+            <a:endParaRPr/>
           </a:p>
         </p:txBody>
       </p:sp>
@@ -7235,6 +7292,7 @@
           <a:lstStyle/>
           <a:p>
             <a:pPr algn="ctr"/>
+            <a:endParaRPr/>
           </a:p>
         </p:txBody>
       </p:sp>
@@ -7278,6 +7336,7 @@
           <a:lstStyle/>
           <a:p>
             <a:pPr algn="ctr"/>
+            <a:endParaRPr/>
           </a:p>
         </p:txBody>
       </p:sp>
@@ -7500,7 +7559,7 @@
 </file>
 
 <file path=ppt/slides/slide5.xml><?xml version="1.0" encoding="utf-8"?>
-<p:sld xmlns:a="http://schemas.openxmlformats.org/drawingml/2006/main" xmlns:p="http://schemas.openxmlformats.org/presentationml/2006/main" xmlns:r="http://schemas.openxmlformats.org/officeDocument/2006/relationships">
+<p:sld xmlns:a="http://schemas.openxmlformats.org/drawingml/2006/main" xmlns:r="http://schemas.openxmlformats.org/officeDocument/2006/relationships" xmlns:p="http://schemas.openxmlformats.org/presentationml/2006/main">
   <p:cSld>
     <p:bg>
       <p:bgPr>
@@ -7516,7 +7575,14 @@
         <p:cNvGrpSpPr/>
         <p:nvPr/>
       </p:nvGrpSpPr>
-      <p:grpSpPr/>
+      <p:grpSpPr>
+        <a:xfrm>
+          <a:off x="0" y="0"/>
+          <a:ext cx="0" cy="0"/>
+          <a:chOff x="0" y="0"/>
+          <a:chExt cx="0" cy="0"/>
+        </a:xfrm>
+      </p:grpSpPr>
       <p:sp>
         <p:nvSpPr>
           <p:cNvPr id="2" name="TextBox 1"/>
@@ -7592,6 +7658,7 @@
           <a:lstStyle/>
           <a:p>
             <a:pPr algn="ctr"/>
+            <a:endParaRPr/>
           </a:p>
         </p:txBody>
       </p:sp>
@@ -7672,6 +7739,7 @@
           <a:lstStyle/>
           <a:p>
             <a:pPr algn="ctr"/>
+            <a:endParaRPr/>
           </a:p>
         </p:txBody>
       </p:sp>
@@ -7839,6 +7907,7 @@
           <a:lstStyle/>
           <a:p>
             <a:pPr algn="ctr"/>
+            <a:endParaRPr/>
           </a:p>
         </p:txBody>
       </p:sp>
@@ -8006,6 +8075,7 @@
           <a:lstStyle/>
           <a:p>
             <a:pPr algn="ctr"/>
+            <a:endParaRPr/>
           </a:p>
         </p:txBody>
       </p:sp>
@@ -8173,6 +8243,7 @@
           <a:lstStyle/>
           <a:p>
             <a:pPr algn="ctr"/>
+            <a:endParaRPr/>
           </a:p>
         </p:txBody>
       </p:sp>
@@ -8340,6 +8411,7 @@
           <a:lstStyle/>
           <a:p>
             <a:pPr algn="ctr"/>
+            <a:endParaRPr/>
           </a:p>
         </p:txBody>
       </p:sp>
@@ -8507,6 +8579,7 @@
           <a:lstStyle/>
           <a:p>
             <a:pPr algn="ctr"/>
+            <a:endParaRPr/>
           </a:p>
         </p:txBody>
       </p:sp>
@@ -8746,7 +8819,7 @@
 </file>
 
 <file path=ppt/slides/slide6.xml><?xml version="1.0" encoding="utf-8"?>
-<p:sld xmlns:a="http://schemas.openxmlformats.org/drawingml/2006/main" xmlns:p="http://schemas.openxmlformats.org/presentationml/2006/main" xmlns:r="http://schemas.openxmlformats.org/officeDocument/2006/relationships">
+<p:sld xmlns:a="http://schemas.openxmlformats.org/drawingml/2006/main" xmlns:r="http://schemas.openxmlformats.org/officeDocument/2006/relationships" xmlns:p="http://schemas.openxmlformats.org/presentationml/2006/main">
   <p:cSld>
     <p:bg>
       <p:bgPr>
@@ -8762,7 +8835,14 @@
         <p:cNvGrpSpPr/>
         <p:nvPr/>
       </p:nvGrpSpPr>
-      <p:grpSpPr/>
+      <p:grpSpPr>
+        <a:xfrm>
+          <a:off x="0" y="0"/>
+          <a:ext cx="0" cy="0"/>
+          <a:chOff x="0" y="0"/>
+          <a:chExt cx="0" cy="0"/>
+        </a:xfrm>
+      </p:grpSpPr>
       <p:sp>
         <p:nvSpPr>
           <p:cNvPr id="2" name="TextBox 1"/>
@@ -8838,6 +8918,7 @@
           <a:lstStyle/>
           <a:p>
             <a:pPr algn="ctr"/>
+            <a:endParaRPr/>
           </a:p>
         </p:txBody>
       </p:sp>
@@ -8918,6 +8999,7 @@
           <a:lstStyle/>
           <a:p>
             <a:pPr algn="ctr"/>
+            <a:endParaRPr/>
           </a:p>
         </p:txBody>
       </p:sp>
@@ -8961,6 +9043,7 @@
           <a:lstStyle/>
           <a:p>
             <a:pPr algn="ctr"/>
+            <a:endParaRPr/>
           </a:p>
         </p:txBody>
       </p:sp>
@@ -9076,6 +9159,7 @@
           <a:lstStyle/>
           <a:p>
             <a:pPr algn="ctr"/>
+            <a:endParaRPr/>
           </a:p>
         </p:txBody>
       </p:sp>
@@ -9119,6 +9203,7 @@
           <a:lstStyle/>
           <a:p>
             <a:pPr algn="ctr"/>
+            <a:endParaRPr/>
           </a:p>
         </p:txBody>
       </p:sp>
@@ -9234,6 +9319,7 @@
           <a:lstStyle/>
           <a:p>
             <a:pPr algn="ctr"/>
+            <a:endParaRPr/>
           </a:p>
         </p:txBody>
       </p:sp>
@@ -9277,6 +9363,7 @@
           <a:lstStyle/>
           <a:p>
             <a:pPr algn="ctr"/>
+            <a:endParaRPr/>
           </a:p>
         </p:txBody>
       </p:sp>
@@ -9392,6 +9479,7 @@
           <a:lstStyle/>
           <a:p>
             <a:pPr algn="ctr"/>
+            <a:endParaRPr/>
           </a:p>
         </p:txBody>
       </p:sp>
@@ -9435,6 +9523,7 @@
           <a:lstStyle/>
           <a:p>
             <a:pPr algn="ctr"/>
+            <a:endParaRPr/>
           </a:p>
         </p:txBody>
       </p:sp>
@@ -9574,6 +9663,7 @@
           <a:lstStyle/>
           <a:p>
             <a:pPr algn="ctr"/>
+            <a:endParaRPr/>
           </a:p>
         </p:txBody>
       </p:sp>
@@ -9617,6 +9707,7 @@
           <a:lstStyle/>
           <a:p>
             <a:pPr algn="ctr"/>
+            <a:endParaRPr/>
           </a:p>
         </p:txBody>
       </p:sp>
@@ -9734,7 +9825,7 @@
 </file>
 
 <file path=ppt/slides/slide7.xml><?xml version="1.0" encoding="utf-8"?>
-<p:sld xmlns:a="http://schemas.openxmlformats.org/drawingml/2006/main" xmlns:p="http://schemas.openxmlformats.org/presentationml/2006/main" xmlns:r="http://schemas.openxmlformats.org/officeDocument/2006/relationships">
+<p:sld xmlns:a="http://schemas.openxmlformats.org/drawingml/2006/main" xmlns:r="http://schemas.openxmlformats.org/officeDocument/2006/relationships" xmlns:p="http://schemas.openxmlformats.org/presentationml/2006/main">
   <p:cSld>
     <p:bg>
       <p:bgPr>
@@ -9750,7 +9841,14 @@
         <p:cNvGrpSpPr/>
         <p:nvPr/>
       </p:nvGrpSpPr>
-      <p:grpSpPr/>
+      <p:grpSpPr>
+        <a:xfrm>
+          <a:off x="0" y="0"/>
+          <a:ext cx="0" cy="0"/>
+          <a:chOff x="0" y="0"/>
+          <a:chExt cx="0" cy="0"/>
+        </a:xfrm>
+      </p:grpSpPr>
       <p:sp>
         <p:nvSpPr>
           <p:cNvPr id="2" name="Rectangle 1"/>
@@ -9791,6 +9889,7 @@
           <a:lstStyle/>
           <a:p>
             <a:pPr algn="ctr"/>
+            <a:endParaRPr/>
           </a:p>
         </p:txBody>
       </p:sp>
@@ -9974,6 +10073,7 @@
           <a:lstStyle/>
           <a:p>
             <a:pPr algn="ctr"/>
+            <a:endParaRPr/>
           </a:p>
         </p:txBody>
       </p:sp>
@@ -10122,6 +10222,7 @@
           <a:lstStyle/>
           <a:p>
             <a:pPr algn="ctr"/>
+            <a:endParaRPr/>
           </a:p>
         </p:txBody>
       </p:sp>
@@ -10204,7 +10305,7 @@
         <p:spPr>
           <a:xfrm>
             <a:off x="5166360" y="2944368"/>
-            <a:ext cx="6126480" cy="292608"/>
+            <a:ext cx="6126480" cy="246221"/>
           </a:xfrm>
           <a:prstGeom prst="rect">
             <a:avLst/>
@@ -10225,8 +10326,42 @@
               </a:defRPr>
             </a:pPr>
             <a:r>
-              <a:t>микровидео, инструкции, чек-листы, шаблоны техотчётов</a:t>
-            </a:r>
+              <a:rPr dirty="0" err="1"/>
+              <a:t>видео</a:t>
+            </a:r>
+            <a:r>
+              <a:rPr dirty="0"/>
+              <a:t>, </a:t>
+            </a:r>
+            <a:r>
+              <a:rPr dirty="0" err="1"/>
+              <a:t>инструкции</a:t>
+            </a:r>
+            <a:r>
+              <a:rPr dirty="0"/>
+              <a:t>, </a:t>
+            </a:r>
+            <a:r>
+              <a:rPr dirty="0" err="1"/>
+              <a:t>чек-листы</a:t>
+            </a:r>
+            <a:r>
+              <a:rPr dirty="0"/>
+              <a:t>, </a:t>
+            </a:r>
+            <a:r>
+              <a:rPr dirty="0" err="1"/>
+              <a:t>шаблоны</a:t>
+            </a:r>
+            <a:r>
+              <a:rPr dirty="0"/>
+              <a:t> </a:t>
+            </a:r>
+            <a:r>
+              <a:rPr dirty="0" err="1"/>
+              <a:t>техотчётов</a:t>
+            </a:r>
+            <a:endParaRPr dirty="0"/>
           </a:p>
         </p:txBody>
       </p:sp>
@@ -10270,6 +10405,7 @@
           <a:lstStyle/>
           <a:p>
             <a:pPr algn="ctr"/>
+            <a:endParaRPr/>
           </a:p>
         </p:txBody>
       </p:sp>
@@ -10418,6 +10554,7 @@
           <a:lstStyle/>
           <a:p>
             <a:pPr algn="ctr"/>
+            <a:endParaRPr/>
           </a:p>
         </p:txBody>
       </p:sp>
@@ -10566,6 +10703,7 @@
           <a:lstStyle/>
           <a:p>
             <a:pPr algn="ctr"/>
+            <a:endParaRPr/>
           </a:p>
         </p:txBody>
       </p:sp>
@@ -10714,6 +10852,7 @@
           <a:lstStyle/>
           <a:p>
             <a:pPr algn="ctr"/>
+            <a:endParaRPr/>
           </a:p>
         </p:txBody>
       </p:sp>

--- a/docs/business/Training-Program.pptx
+++ b/docs/business/Training-Program.pptx
@@ -308,7 +308,7 @@
           <a:p>
             <a:fld id="{5BCAD085-E8A6-8845-BD4E-CB4CCA059FC4}" type="datetimeFigureOut">
               <a:rPr lang="en-US" smtClean="0"/>
-              <a:t>7/8/2026</a:t>
+              <a:t>7/9/2026</a:t>
             </a:fld>
             <a:endParaRPr lang="en-US"/>
           </a:p>
@@ -476,7 +476,7 @@
           <a:p>
             <a:fld id="{5BCAD085-E8A6-8845-BD4E-CB4CCA059FC4}" type="datetimeFigureOut">
               <a:rPr lang="en-US" smtClean="0"/>
-              <a:t>7/8/2026</a:t>
+              <a:t>7/9/2026</a:t>
             </a:fld>
             <a:endParaRPr lang="en-US"/>
           </a:p>
@@ -654,7 +654,7 @@
           <a:p>
             <a:fld id="{5BCAD085-E8A6-8845-BD4E-CB4CCA059FC4}" type="datetimeFigureOut">
               <a:rPr lang="en-US" smtClean="0"/>
-              <a:t>7/8/2026</a:t>
+              <a:t>7/9/2026</a:t>
             </a:fld>
             <a:endParaRPr lang="en-US"/>
           </a:p>
@@ -822,7 +822,7 @@
           <a:p>
             <a:fld id="{5BCAD085-E8A6-8845-BD4E-CB4CCA059FC4}" type="datetimeFigureOut">
               <a:rPr lang="en-US" smtClean="0"/>
-              <a:t>7/8/2026</a:t>
+              <a:t>7/9/2026</a:t>
             </a:fld>
             <a:endParaRPr lang="en-US"/>
           </a:p>
@@ -1067,7 +1067,7 @@
           <a:p>
             <a:fld id="{5BCAD085-E8A6-8845-BD4E-CB4CCA059FC4}" type="datetimeFigureOut">
               <a:rPr lang="en-US" smtClean="0"/>
-              <a:t>7/8/2026</a:t>
+              <a:t>7/9/2026</a:t>
             </a:fld>
             <a:endParaRPr lang="en-US"/>
           </a:p>
@@ -1352,7 +1352,7 @@
           <a:p>
             <a:fld id="{5BCAD085-E8A6-8845-BD4E-CB4CCA059FC4}" type="datetimeFigureOut">
               <a:rPr lang="en-US" smtClean="0"/>
-              <a:t>7/8/2026</a:t>
+              <a:t>7/9/2026</a:t>
             </a:fld>
             <a:endParaRPr lang="en-US"/>
           </a:p>
@@ -1771,7 +1771,7 @@
           <a:p>
             <a:fld id="{5BCAD085-E8A6-8845-BD4E-CB4CCA059FC4}" type="datetimeFigureOut">
               <a:rPr lang="en-US" smtClean="0"/>
-              <a:t>7/8/2026</a:t>
+              <a:t>7/9/2026</a:t>
             </a:fld>
             <a:endParaRPr lang="en-US"/>
           </a:p>
@@ -1888,7 +1888,7 @@
           <a:p>
             <a:fld id="{5BCAD085-E8A6-8845-BD4E-CB4CCA059FC4}" type="datetimeFigureOut">
               <a:rPr lang="en-US" smtClean="0"/>
-              <a:t>7/8/2026</a:t>
+              <a:t>7/9/2026</a:t>
             </a:fld>
             <a:endParaRPr lang="en-US"/>
           </a:p>
@@ -1983,7 +1983,7 @@
           <a:p>
             <a:fld id="{5BCAD085-E8A6-8845-BD4E-CB4CCA059FC4}" type="datetimeFigureOut">
               <a:rPr lang="en-US" smtClean="0"/>
-              <a:t>7/8/2026</a:t>
+              <a:t>7/9/2026</a:t>
             </a:fld>
             <a:endParaRPr lang="en-US"/>
           </a:p>
@@ -2258,7 +2258,7 @@
           <a:p>
             <a:fld id="{5BCAD085-E8A6-8845-BD4E-CB4CCA059FC4}" type="datetimeFigureOut">
               <a:rPr lang="en-US" smtClean="0"/>
-              <a:t>7/8/2026</a:t>
+              <a:t>7/9/2026</a:t>
             </a:fld>
             <a:endParaRPr lang="en-US"/>
           </a:p>
@@ -2510,7 +2510,7 @@
           <a:p>
             <a:fld id="{5BCAD085-E8A6-8845-BD4E-CB4CCA059FC4}" type="datetimeFigureOut">
               <a:rPr lang="en-US" smtClean="0"/>
-              <a:t>7/8/2026</a:t>
+              <a:t>7/9/2026</a:t>
             </a:fld>
             <a:endParaRPr lang="en-US"/>
           </a:p>
@@ -2721,7 +2721,7 @@
           <a:p>
             <a:fld id="{5BCAD085-E8A6-8845-BD4E-CB4CCA059FC4}" type="datetimeFigureOut">
               <a:rPr lang="en-US" smtClean="0"/>
-              <a:t>7/8/2026</a:t>
+              <a:t>7/9/2026</a:t>
             </a:fld>
             <a:endParaRPr lang="en-US"/>
           </a:p>
@@ -3150,50 +3150,6 @@
       </p:sp>
       <p:sp>
         <p:nvSpPr>
-          <p:cNvPr id="3" name="Oval 2"/>
-          <p:cNvSpPr/>
-          <p:nvPr/>
-        </p:nvSpPr>
-        <p:spPr>
-          <a:xfrm>
-            <a:off x="10927080" y="457200"/>
-            <a:ext cx="685800" cy="685800"/>
-          </a:xfrm>
-          <a:prstGeom prst="ellipse">
-            <a:avLst/>
-          </a:prstGeom>
-          <a:solidFill>
-            <a:srgbClr val="3DB89A"/>
-          </a:solidFill>
-          <a:ln>
-            <a:noFill/>
-          </a:ln>
-        </p:spPr>
-        <p:style>
-          <a:lnRef idx="1">
-            <a:schemeClr val="accent1"/>
-          </a:lnRef>
-          <a:fillRef idx="3">
-            <a:schemeClr val="accent1"/>
-          </a:fillRef>
-          <a:effectRef idx="2">
-            <a:schemeClr val="accent1"/>
-          </a:effectRef>
-          <a:fontRef idx="minor">
-            <a:schemeClr val="lt1"/>
-          </a:fontRef>
-        </p:style>
-        <p:txBody>
-          <a:bodyPr rtlCol="0" anchor="ctr"/>
-          <a:lstStyle/>
-          <a:p>
-            <a:pPr algn="ctr"/>
-            <a:endParaRPr/>
-          </a:p>
-        </p:txBody>
-      </p:sp>
-      <p:sp>
-        <p:nvSpPr>
           <p:cNvPr id="4" name="Rectangle 3"/>
           <p:cNvSpPr/>
           <p:nvPr/>
@@ -3413,41 +3369,6 @@
             </a:pPr>
             <a:r>
               <a:t>Korovas · data-collector · datapipe</a:t>
-            </a:r>
-          </a:p>
-        </p:txBody>
-      </p:sp>
-      <p:sp>
-        <p:nvSpPr>
-          <p:cNvPr id="10" name="TextBox 9"/>
-          <p:cNvSpPr txBox="1"/>
-          <p:nvPr/>
-        </p:nvSpPr>
-        <p:spPr>
-          <a:xfrm>
-            <a:off x="5074920" y="685800"/>
-            <a:ext cx="6400800" cy="365760"/>
-          </a:xfrm>
-          <a:prstGeom prst="rect">
-            <a:avLst/>
-          </a:prstGeom>
-          <a:noFill/>
-        </p:spPr>
-        <p:txBody>
-          <a:bodyPr wrap="square" anchor="t">
-            <a:spAutoFit/>
-          </a:bodyPr>
-          <a:lstStyle/>
-          <a:p>
-            <a:pPr algn="r">
-              <a:defRPr sz="1200" b="0">
-                <a:solidFill>
-                  <a:srgbClr val="7A828C"/>
-                </a:solidFill>
-              </a:defRPr>
-            </a:pPr>
-            <a:r>
-              <a:t>data-collector · datapipe · CVAT · инференс · эксплуатация</a:t>
             </a:r>
           </a:p>
         </p:txBody>
@@ -3908,7 +3829,7 @@
         <p:spPr>
           <a:xfrm>
             <a:off x="685800" y="5989320"/>
-            <a:ext cx="10972800" cy="411480"/>
+            <a:ext cx="10972800" cy="369332"/>
           </a:xfrm>
           <a:prstGeom prst="rect">
             <a:avLst/>
@@ -3929,8 +3850,42 @@
               </a:defRPr>
             </a:pPr>
             <a:r>
-              <a:t>300 ч · 15 недель · 2 роли · учебный стенд</a:t>
-            </a:r>
+              <a:rPr lang="ru-RU" dirty="0"/>
+              <a:t>480</a:t>
+            </a:r>
+            <a:r>
+              <a:rPr dirty="0"/>
+              <a:t> ч · 15 </a:t>
+            </a:r>
+            <a:r>
+              <a:rPr dirty="0" err="1"/>
+              <a:t>недель</a:t>
+            </a:r>
+            <a:r>
+              <a:rPr dirty="0"/>
+              <a:t> · 2 </a:t>
+            </a:r>
+            <a:r>
+              <a:rPr dirty="0" err="1"/>
+              <a:t>роли</a:t>
+            </a:r>
+            <a:r>
+              <a:rPr dirty="0"/>
+              <a:t> · </a:t>
+            </a:r>
+            <a:r>
+              <a:rPr dirty="0" err="1"/>
+              <a:t>учебный</a:t>
+            </a:r>
+            <a:r>
+              <a:rPr dirty="0"/>
+              <a:t> </a:t>
+            </a:r>
+            <a:r>
+              <a:rPr dirty="0" err="1"/>
+              <a:t>стенд</a:t>
+            </a:r>
+            <a:endParaRPr dirty="0"/>
           </a:p>
         </p:txBody>
       </p:sp>
@@ -8735,7 +8690,84 @@
               </a:defRPr>
             </a:pPr>
             <a:r>
-              <a:t>Форматы чередуются: сначала короткое объяснение, затем демонстрация, практика и проверка результата.</a:t>
+              <a:rPr dirty="0" err="1"/>
+              <a:t>Форматы</a:t>
+            </a:r>
+            <a:r>
+              <a:rPr dirty="0"/>
+              <a:t> </a:t>
+            </a:r>
+            <a:r>
+              <a:rPr dirty="0" err="1"/>
+              <a:t>чередуются</a:t>
+            </a:r>
+            <a:r>
+              <a:rPr dirty="0"/>
+              <a:t>: </a:t>
+            </a:r>
+            <a:r>
+              <a:rPr dirty="0" err="1"/>
+              <a:t>сначала</a:t>
+            </a:r>
+            <a:r>
+              <a:rPr dirty="0"/>
+              <a:t> </a:t>
+            </a:r>
+            <a:r>
+              <a:rPr dirty="0" err="1"/>
+              <a:t>короткое</a:t>
+            </a:r>
+            <a:r>
+              <a:rPr dirty="0"/>
+              <a:t> </a:t>
+            </a:r>
+            <a:r>
+              <a:rPr dirty="0" err="1"/>
+              <a:t>объяснение</a:t>
+            </a:r>
+            <a:r>
+              <a:rPr dirty="0"/>
+              <a:t>, </a:t>
+            </a:r>
+            <a:r>
+              <a:rPr dirty="0" err="1"/>
+              <a:t>затем</a:t>
+            </a:r>
+            <a:r>
+              <a:rPr dirty="0"/>
+              <a:t> </a:t>
+            </a:r>
+            <a:r>
+              <a:rPr dirty="0" err="1"/>
+              <a:t>демонстрация</a:t>
+            </a:r>
+            <a:r>
+              <a:rPr dirty="0"/>
+              <a:t>, </a:t>
+            </a:r>
+            <a:r>
+              <a:rPr dirty="0" err="1"/>
+              <a:t>практика</a:t>
+            </a:r>
+            <a:r>
+              <a:rPr dirty="0"/>
+              <a:t> и </a:t>
+            </a:r>
+            <a:r>
+              <a:rPr dirty="0" err="1"/>
+              <a:t>проверка</a:t>
+            </a:r>
+            <a:r>
+              <a:rPr dirty="0"/>
+              <a:t> </a:t>
+            </a:r>
+            <a:r>
+              <a:rPr dirty="0" err="1"/>
+              <a:t>результата</a:t>
+            </a:r>
+            <a:r>
+              <a:rPr dirty="0"/>
+              <a:t>.</a:t>
             </a:r>
           </a:p>
         </p:txBody>
